--- a/docs/proposals/Precision_PB_Blueprint_Aswan_editable_V8.pptx
+++ b/docs/proposals/Precision_PB_Blueprint_Aswan_editable_V8.pptx
@@ -5,7 +5,7 @@
     <p:sldMasterId id="2147483648" r:id="rId1"/>
   </p:sldMasterIdLst>
   <p:notesMasterIdLst>
-    <p:notesMasterId r:id="rId23"/>
+    <p:notesMasterId r:id="rId24"/>
   </p:notesMasterIdLst>
   <p:sldIdLst>
     <p:sldId id="256" r:id="rId2"/>
@@ -29,7 +29,7 @@
     <p:sldId id="274" r:id="rId20"/>
     <p:sldId id="275" r:id="rId21"/>
     <p:sldId id="276" r:id="rId22"/>
-    <p:sldId id="277" r:id="rId28"/>
+    <p:sldId id="277" r:id="rId23"/>
   </p:sldIdLst>
   <p:sldSz cx="12192000" cy="6858000"/>
   <p:notesSz cx="6858000" cy="9144000"/>
@@ -16842,7 +16842,7 @@
 </file>
 
 <file path=ppt/slides/slide22.xml><?xml version="1.0" encoding="utf-8"?>
-<p:sld xmlns:a="http://schemas.openxmlformats.org/drawingml/2006/main" xmlns:p="http://schemas.openxmlformats.org/presentationml/2006/main" xmlns:r="http://schemas.openxmlformats.org/officeDocument/2006/relationships">
+<p:sld xmlns:a="http://schemas.openxmlformats.org/drawingml/2006/main" xmlns:r="http://schemas.openxmlformats.org/officeDocument/2006/relationships" xmlns:p="http://schemas.openxmlformats.org/presentationml/2006/main">
   <p:cSld>
     <p:spTree>
       <p:nvGrpSpPr>
@@ -16850,7 +16850,14 @@
         <p:cNvGrpSpPr/>
         <p:nvPr/>
       </p:nvGrpSpPr>
-      <p:grpSpPr/>
+      <p:grpSpPr>
+        <a:xfrm>
+          <a:off x="0" y="0"/>
+          <a:ext cx="0" cy="0"/>
+          <a:chOff x="0" y="0"/>
+          <a:chExt cx="0" cy="0"/>
+        </a:xfrm>
+      </p:grpSpPr>
       <p:sp>
         <p:nvSpPr>
           <p:cNvPr id="2" name="TextBox 1"/>
@@ -16974,7 +16981,7 @@
         <p:spPr>
           <a:xfrm>
             <a:off x="365760" y="1783080"/>
-            <a:ext cx="5669280" cy="2743200"/>
+            <a:ext cx="5669280" cy="1384995"/>
           </a:xfrm>
           <a:prstGeom prst="rect">
             <a:avLst/>
@@ -16989,7 +16996,7 @@
           </a:ln>
         </p:spPr>
         <p:txBody>
-          <a:bodyPr wrap="square" lIns="109728" rIns="109728" tIns="91440" bIns="91440">
+          <a:bodyPr wrap="square" lIns="109728" tIns="91440" rIns="109728" bIns="91440">
             <a:spAutoFit/>
           </a:bodyPr>
           <a:lstStyle/>
@@ -17016,59 +17023,68 @@
             </a:r>
           </a:p>
           <a:p>
-            <a:r>
-              <a:rPr sz="400" b="0">
+            <a:endParaRPr sz="1000" b="0">
+              <a:solidFill>
+                <a:srgbClr val="6B7280"/>
+              </a:solidFill>
+              <a:latin typeface="Noto Sans JP"/>
+            </a:endParaRPr>
+          </a:p>
+          <a:p>
+            <a:r>
+              <a:rPr sz="1300" b="1">
+                <a:solidFill>
+                  <a:srgbClr val="C4763A"/>
+                </a:solidFill>
+                <a:latin typeface="Noto Sans JP"/>
+              </a:rPr>
+              <a:t>・要件カスタマイズ ………… 約 ¥200,000（一括）</a:t>
+            </a:r>
+          </a:p>
+          <a:p>
+            <a:r>
+              <a:rPr sz="1000" b="0">
+                <a:solidFill>
+                  <a:srgbClr val="6B7280"/>
+                </a:solidFill>
+                <a:latin typeface="Noto Sans JP"/>
+              </a:rPr>
+              <a:t>   貴社固有データ連携・UI 調整・帳票テンプレ</a:t>
+            </a:r>
+          </a:p>
+          <a:p>
+            <a:endParaRPr sz="1000" b="0">
+              <a:solidFill>
+                <a:srgbClr val="6B7280"/>
+              </a:solidFill>
+              <a:latin typeface="Noto Sans JP"/>
+            </a:endParaRPr>
+          </a:p>
+          <a:p>
+            <a:r>
+              <a:rPr sz="1200" b="0">
                 <a:solidFill>
                   <a:srgbClr val="111827"/>
                 </a:solidFill>
                 <a:latin typeface="Noto Sans JP"/>
               </a:rPr>
-              <a:t/>
-            </a:r>
-          </a:p>
-          <a:p>
-            <a:r>
-              <a:rPr sz="1300" b="1">
-                <a:solidFill>
-                  <a:srgbClr val="C4763A"/>
-                </a:solidFill>
-                <a:latin typeface="Noto Sans JP"/>
-              </a:rPr>
-              <a:t>・要件カスタマイズ ………… 約 ¥200,000（一括）</a:t>
-            </a:r>
-          </a:p>
-          <a:p>
-            <a:r>
-              <a:rPr sz="1000" b="0">
-                <a:solidFill>
-                  <a:srgbClr val="6B7280"/>
-                </a:solidFill>
-                <a:latin typeface="Noto Sans JP"/>
-              </a:rPr>
-              <a:t>   貴社固有データ連携・UI 調整・帳票テンプレ・追加スクレイパー 等</a:t>
-            </a:r>
-          </a:p>
-          <a:p>
-            <a:r>
-              <a:rPr sz="400" b="0">
+              <a:t>・想定期間：</a:t>
+            </a:r>
+            <a:r>
+              <a:rPr lang="ja-JP" altLang="en-US" sz="1200">
                 <a:solidFill>
                   <a:srgbClr val="111827"/>
                 </a:solidFill>
                 <a:latin typeface="Noto Sans JP"/>
               </a:rPr>
-              <a:t/>
-            </a:r>
-          </a:p>
-          <a:p>
-            <a:r>
-              <a:rPr sz="1200" b="0">
-                <a:solidFill>
-                  <a:srgbClr val="111827"/>
-                </a:solidFill>
-                <a:latin typeface="Noto Sans JP"/>
-              </a:rPr>
-              <a:t>・想定期間：1〜2 ヶ月</a:t>
-            </a:r>
+              <a:t>２週間</a:t>
+            </a:r>
+            <a:endParaRPr sz="1200" b="0">
+              <a:solidFill>
+                <a:srgbClr val="111827"/>
+              </a:solidFill>
+              <a:latin typeface="Noto Sans JP"/>
+            </a:endParaRPr>
           </a:p>
         </p:txBody>
       </p:sp>
@@ -17119,7 +17135,7 @@
         <p:spPr>
           <a:xfrm>
             <a:off x="6217920" y="1783080"/>
-            <a:ext cx="5669280" cy="2743200"/>
+            <a:ext cx="5669280" cy="2616101"/>
           </a:xfrm>
           <a:prstGeom prst="rect">
             <a:avLst/>
@@ -17134,19 +17150,192 @@
           </a:ln>
         </p:spPr>
         <p:txBody>
-          <a:bodyPr wrap="square" lIns="109728" rIns="109728" tIns="91440" bIns="91440">
+          <a:bodyPr wrap="square" lIns="109728" tIns="91440" rIns="109728" bIns="91440">
             <a:spAutoFit/>
           </a:bodyPr>
           <a:lstStyle/>
           <a:p>
             <a:r>
+              <a:rPr sz="1400" b="1">
+                <a:solidFill>
+                  <a:srgbClr val="111827"/>
+                </a:solidFill>
+                <a:latin typeface="Noto Sans JP"/>
+              </a:rPr>
+              <a:t>・データ更新（競合 + 対象製品 100 件）  約 ¥30,000</a:t>
+            </a:r>
+            <a:r>
+              <a:rPr lang="en-US" sz="1400" b="1">
+                <a:solidFill>
+                  <a:srgbClr val="111827"/>
+                </a:solidFill>
+                <a:latin typeface="Noto Sans JP"/>
+              </a:rPr>
+              <a:t>/</a:t>
+            </a:r>
+            <a:r>
+              <a:rPr lang="ja-JP" altLang="en-US" sz="1400" b="1">
+                <a:solidFill>
+                  <a:srgbClr val="111827"/>
+                </a:solidFill>
+                <a:latin typeface="Noto Sans JP"/>
+              </a:rPr>
+              <a:t>製品</a:t>
+            </a:r>
+            <a:endParaRPr sz="1400" b="1">
+              <a:solidFill>
+                <a:srgbClr val="111827"/>
+              </a:solidFill>
+              <a:latin typeface="Noto Sans JP"/>
+            </a:endParaRPr>
+          </a:p>
+          <a:p>
+            <a:r>
+              <a:rPr sz="1000" b="0">
+                <a:solidFill>
+                  <a:srgbClr val="6B7280"/>
+                </a:solidFill>
+                <a:latin typeface="Noto Sans JP"/>
+              </a:rPr>
+              <a:t> </a:t>
+            </a:r>
+            <a:r>
+              <a:rPr lang="ja-JP" altLang="en-US" sz="1000" b="0">
+                <a:solidFill>
+                  <a:srgbClr val="6B7280"/>
+                </a:solidFill>
+                <a:latin typeface="Noto Sans JP"/>
+              </a:rPr>
+              <a:t>今回デモ投入規模</a:t>
+            </a:r>
+            <a:endParaRPr sz="1000" b="0">
+              <a:solidFill>
+                <a:srgbClr val="6B7280"/>
+              </a:solidFill>
+              <a:latin typeface="Noto Sans JP"/>
+            </a:endParaRPr>
+          </a:p>
+          <a:p>
+            <a:endParaRPr lang="en-US" sz="1000" b="0">
+              <a:solidFill>
+                <a:srgbClr val="6B7280"/>
+              </a:solidFill>
+              <a:latin typeface="Noto Sans JP"/>
+            </a:endParaRPr>
+          </a:p>
+          <a:p>
+            <a:r>
+              <a:rPr lang="ja-JP" altLang="en-US" sz="1400" b="1">
+                <a:solidFill>
+                  <a:srgbClr val="111827"/>
+                </a:solidFill>
+                <a:latin typeface="Noto Sans JP" panose="020B0200000000000000" pitchFamily="50" charset="-128"/>
+                <a:ea typeface="Noto Sans JP" panose="020B0200000000000000" pitchFamily="50" charset="-128"/>
+              </a:rPr>
+              <a:t>・データ更新（競合 </a:t>
+            </a:r>
+            <a:r>
+              <a:rPr lang="en-US" altLang="ja-JP" sz="1400" b="1">
+                <a:solidFill>
+                  <a:srgbClr val="111827"/>
+                </a:solidFill>
+                <a:latin typeface="Noto Sans JP" panose="020B0200000000000000" pitchFamily="50" charset="-128"/>
+                <a:ea typeface="Noto Sans JP" panose="020B0200000000000000" pitchFamily="50" charset="-128"/>
+              </a:rPr>
+              <a:t>+ </a:t>
+            </a:r>
+            <a:r>
+              <a:rPr lang="ja-JP" altLang="en-US" sz="1400" b="1">
+                <a:solidFill>
+                  <a:srgbClr val="111827"/>
+                </a:solidFill>
+                <a:latin typeface="Noto Sans JP" panose="020B0200000000000000" pitchFamily="50" charset="-128"/>
+                <a:ea typeface="Noto Sans JP" panose="020B0200000000000000" pitchFamily="50" charset="-128"/>
+              </a:rPr>
+              <a:t>対象製品 </a:t>
+            </a:r>
+            <a:r>
+              <a:rPr lang="en-US" altLang="ja-JP" sz="1400" b="1">
+                <a:solidFill>
+                  <a:srgbClr val="111827"/>
+                </a:solidFill>
+                <a:latin typeface="Noto Sans JP" panose="020B0200000000000000" pitchFamily="50" charset="-128"/>
+                <a:ea typeface="Noto Sans JP" panose="020B0200000000000000" pitchFamily="50" charset="-128"/>
+              </a:rPr>
+              <a:t>50 </a:t>
+            </a:r>
+            <a:r>
+              <a:rPr lang="ja-JP" altLang="en-US" sz="1400" b="1">
+                <a:solidFill>
+                  <a:srgbClr val="111827"/>
+                </a:solidFill>
+                <a:latin typeface="Noto Sans JP" panose="020B0200000000000000" pitchFamily="50" charset="-128"/>
+                <a:ea typeface="Noto Sans JP" panose="020B0200000000000000" pitchFamily="50" charset="-128"/>
+              </a:rPr>
+              <a:t>件以下）  約 </a:t>
+            </a:r>
+            <a:r>
+              <a:rPr lang="en-US" altLang="ja-JP" sz="1400" b="1">
+                <a:solidFill>
+                  <a:srgbClr val="111827"/>
+                </a:solidFill>
+                <a:latin typeface="Noto Sans JP" panose="020B0200000000000000" pitchFamily="50" charset="-128"/>
+                <a:ea typeface="Noto Sans JP" panose="020B0200000000000000" pitchFamily="50" charset="-128"/>
+              </a:rPr>
+              <a:t>¥15,000/</a:t>
+            </a:r>
+            <a:r>
+              <a:rPr lang="ja-JP" altLang="en-US" sz="1400" b="1">
+                <a:solidFill>
+                  <a:srgbClr val="111827"/>
+                </a:solidFill>
+                <a:latin typeface="Noto Sans JP" panose="020B0200000000000000" pitchFamily="50" charset="-128"/>
+                <a:ea typeface="Noto Sans JP" panose="020B0200000000000000" pitchFamily="50" charset="-128"/>
+              </a:rPr>
+              <a:t>製品</a:t>
+            </a:r>
+            <a:endParaRPr lang="en-US" altLang="ja-JP" sz="1400" b="1">
+              <a:solidFill>
+                <a:srgbClr val="111827"/>
+              </a:solidFill>
+              <a:latin typeface="Noto Sans JP" panose="020B0200000000000000" pitchFamily="50" charset="-128"/>
+              <a:ea typeface="Noto Sans JP" panose="020B0200000000000000" pitchFamily="50" charset="-128"/>
+            </a:endParaRPr>
+          </a:p>
+          <a:p>
+            <a:r>
+              <a:rPr lang="ja-JP" altLang="en-US" sz="1000" b="0">
+                <a:solidFill>
+                  <a:srgbClr val="6B7280"/>
+                </a:solidFill>
+                <a:latin typeface="Noto Sans JP"/>
+              </a:rPr>
+              <a:t>小規模</a:t>
+            </a:r>
+            <a:endParaRPr lang="en-US" altLang="ja-JP" sz="1000" b="0">
+              <a:solidFill>
+                <a:srgbClr val="6B7280"/>
+              </a:solidFill>
+              <a:latin typeface="Noto Sans JP"/>
+            </a:endParaRPr>
+          </a:p>
+          <a:p>
+            <a:endParaRPr sz="1000" b="0">
+              <a:solidFill>
+                <a:srgbClr val="6B7280"/>
+              </a:solidFill>
+              <a:latin typeface="Noto Sans JP"/>
+            </a:endParaRPr>
+          </a:p>
+          <a:p>
+            <a:r>
               <a:rPr sz="1300" b="1">
                 <a:solidFill>
                   <a:srgbClr val="111827"/>
                 </a:solidFill>
                 <a:latin typeface="Noto Sans JP"/>
               </a:rPr>
-              <a:t>・データ更新（競合 + 対象製品 100 件）  約 ¥30,000</a:t>
+              <a:t>・保守サービス ………………… ¥50,000 / 月</a:t>
             </a:r>
           </a:p>
           <a:p>
@@ -17157,29 +17346,26 @@
                 </a:solidFill>
                 <a:latin typeface="Noto Sans JP"/>
               </a:rPr>
-              <a:t>   月次スクレイピング再取得・差分反映</a:t>
-            </a:r>
-          </a:p>
-          <a:p>
-            <a:r>
-              <a:rPr sz="400" b="0">
+              <a:t>   リモート障害対応・モデル更新・プロンプト改善</a:t>
+            </a:r>
+          </a:p>
+          <a:p>
+            <a:endParaRPr sz="1000" b="0">
+              <a:solidFill>
+                <a:srgbClr val="6B7280"/>
+              </a:solidFill>
+              <a:latin typeface="Noto Sans JP"/>
+            </a:endParaRPr>
+          </a:p>
+          <a:p>
+            <a:r>
+              <a:rPr sz="1300" b="1">
                 <a:solidFill>
                   <a:srgbClr val="111827"/>
                 </a:solidFill>
                 <a:latin typeface="Noto Sans JP"/>
               </a:rPr>
-              <a:t/>
-            </a:r>
-          </a:p>
-          <a:p>
-            <a:r>
-              <a:rPr sz="1300" b="1">
-                <a:solidFill>
-                  <a:srgbClr val="111827"/>
-                </a:solidFill>
-                <a:latin typeface="Noto Sans JP"/>
-              </a:rPr>
-              <a:t>・保守サービス ………………… ¥50,000 / 月</a:t>
+              <a:t>・LLM API 実費（想定）……… 約 ¥10,000 / 月</a:t>
             </a:r>
           </a:p>
           <a:p>
@@ -17190,52 +17376,16 @@
                 </a:solidFill>
                 <a:latin typeface="Noto Sans JP"/>
               </a:rPr>
-              <a:t>   リモート障害対応・モデル更新・プロンプト改善</a:t>
-            </a:r>
-          </a:p>
-          <a:p>
-            <a:r>
-              <a:rPr sz="400" b="0">
-                <a:solidFill>
-                  <a:srgbClr val="111827"/>
-                </a:solidFill>
-                <a:latin typeface="Noto Sans JP"/>
-              </a:rPr>
-              <a:t/>
-            </a:r>
-          </a:p>
-          <a:p>
-            <a:r>
-              <a:rPr sz="1300" b="1">
-                <a:solidFill>
-                  <a:srgbClr val="111827"/>
-                </a:solidFill>
-                <a:latin typeface="Noto Sans JP"/>
-              </a:rPr>
-              <a:t>・LLM API 実費（想定）……… 約 ¥10,000 / 月</a:t>
-            </a:r>
-          </a:p>
-          <a:p>
-            <a:r>
-              <a:rPr sz="1000" b="0">
-                <a:solidFill>
-                  <a:srgbClr val="6B7280"/>
-                </a:solidFill>
-                <a:latin typeface="Noto Sans JP"/>
-              </a:rPr>
               <a:t>   利用ボリュームに応じて変動（実費精算）</a:t>
             </a:r>
           </a:p>
           <a:p>
-            <a:r>
-              <a:rPr sz="400" b="0">
-                <a:solidFill>
-                  <a:srgbClr val="111827"/>
-                </a:solidFill>
-                <a:latin typeface="Noto Sans JP"/>
-              </a:rPr>
-              <a:t/>
-            </a:r>
+            <a:endParaRPr sz="1000" b="0">
+              <a:solidFill>
+                <a:srgbClr val="6B7280"/>
+              </a:solidFill>
+              <a:latin typeface="Noto Sans JP"/>
+            </a:endParaRPr>
           </a:p>
           <a:p>
             <a:r>
@@ -17323,7 +17473,7 @@
           </a:ln>
         </p:spPr>
         <p:txBody>
-          <a:bodyPr wrap="square" lIns="109728" rIns="109728" tIns="91440" bIns="91440">
+          <a:bodyPr wrap="square" lIns="109728" tIns="91440" rIns="109728" bIns="91440">
             <a:spAutoFit/>
           </a:bodyPr>
           <a:lstStyle/>
@@ -17373,7 +17523,7 @@
           </a:ln>
         </p:spPr>
         <p:txBody>
-          <a:bodyPr wrap="square" lIns="109728" rIns="109728" tIns="91440" bIns="91440">
+          <a:bodyPr wrap="square" lIns="109728" tIns="91440" rIns="109728" bIns="91440">
             <a:spAutoFit/>
           </a:bodyPr>
           <a:lstStyle/>
